--- a/Capstone3_Presentation.pptx
+++ b/Capstone3_Presentation.pptx
@@ -299,7 +299,7 @@
           <a:p>
             <a:fld id="{0EAB0777-4C60-462E-A92C-CDAFD498799C}" type="datetimeFigureOut">
               <a:rPr lang="en-US" smtClean="0"/>
-              <a:t>3/7/2026</a:t>
+              <a:t>3/12/2026</a:t>
             </a:fld>
             <a:endParaRPr lang="en-US"/>
           </a:p>
@@ -464,7 +464,7 @@
           <a:p>
             <a:fld id="{0EAB0777-4C60-462E-A92C-CDAFD498799C}" type="datetimeFigureOut">
               <a:rPr lang="en-US" smtClean="0"/>
-              <a:t>3/7/2026</a:t>
+              <a:t>3/12/2026</a:t>
             </a:fld>
             <a:endParaRPr lang="en-US"/>
           </a:p>
@@ -639,7 +639,7 @@
           <a:p>
             <a:fld id="{0EAB0777-4C60-462E-A92C-CDAFD498799C}" type="datetimeFigureOut">
               <a:rPr lang="en-US" smtClean="0"/>
-              <a:t>3/7/2026</a:t>
+              <a:t>3/12/2026</a:t>
             </a:fld>
             <a:endParaRPr lang="en-US"/>
           </a:p>
@@ -804,7 +804,7 @@
           <a:p>
             <a:fld id="{0EAB0777-4C60-462E-A92C-CDAFD498799C}" type="datetimeFigureOut">
               <a:rPr lang="en-US" smtClean="0"/>
-              <a:t>3/7/2026</a:t>
+              <a:t>3/12/2026</a:t>
             </a:fld>
             <a:endParaRPr lang="en-US"/>
           </a:p>
@@ -1046,7 +1046,7 @@
           <a:p>
             <a:fld id="{0EAB0777-4C60-462E-A92C-CDAFD498799C}" type="datetimeFigureOut">
               <a:rPr lang="en-US" smtClean="0"/>
-              <a:t>3/7/2026</a:t>
+              <a:t>3/12/2026</a:t>
             </a:fld>
             <a:endParaRPr lang="en-US"/>
           </a:p>
@@ -1310,7 +1310,7 @@
           <a:p>
             <a:fld id="{0EAB0777-4C60-462E-A92C-CDAFD498799C}" type="datetimeFigureOut">
               <a:rPr lang="en-US" smtClean="0"/>
-              <a:t>3/7/2026</a:t>
+              <a:t>3/12/2026</a:t>
             </a:fld>
             <a:endParaRPr lang="en-US"/>
           </a:p>
@@ -1688,7 +1688,7 @@
           <a:p>
             <a:fld id="{0EAB0777-4C60-462E-A92C-CDAFD498799C}" type="datetimeFigureOut">
               <a:rPr lang="en-US" smtClean="0"/>
-              <a:t>3/7/2026</a:t>
+              <a:t>3/12/2026</a:t>
             </a:fld>
             <a:endParaRPr lang="en-US"/>
           </a:p>
@@ -1838,7 +1838,7 @@
           <a:p>
             <a:fld id="{0EAB0777-4C60-462E-A92C-CDAFD498799C}" type="datetimeFigureOut">
               <a:rPr lang="en-US" smtClean="0"/>
-              <a:t>3/7/2026</a:t>
+              <a:t>3/12/2026</a:t>
             </a:fld>
             <a:endParaRPr lang="en-US"/>
           </a:p>
@@ -1928,7 +1928,7 @@
           <a:p>
             <a:fld id="{0EAB0777-4C60-462E-A92C-CDAFD498799C}" type="datetimeFigureOut">
               <a:rPr lang="en-US" smtClean="0"/>
-              <a:t>3/7/2026</a:t>
+              <a:t>3/12/2026</a:t>
             </a:fld>
             <a:endParaRPr lang="en-US"/>
           </a:p>
@@ -2189,7 +2189,7 @@
           <a:p>
             <a:fld id="{0EAB0777-4C60-462E-A92C-CDAFD498799C}" type="datetimeFigureOut">
               <a:rPr lang="en-US" smtClean="0"/>
-              <a:t>3/7/2026</a:t>
+              <a:t>3/12/2026</a:t>
             </a:fld>
             <a:endParaRPr lang="en-US"/>
           </a:p>
@@ -2477,7 +2477,7 @@
           <a:p>
             <a:fld id="{0EAB0777-4C60-462E-A92C-CDAFD498799C}" type="datetimeFigureOut">
               <a:rPr lang="en-US" smtClean="0"/>
-              <a:t>3/7/2026</a:t>
+              <a:t>3/12/2026</a:t>
             </a:fld>
             <a:endParaRPr lang="en-US"/>
           </a:p>
@@ -3248,7 +3248,7 @@
           <a:p>
             <a:fld id="{0EAB0777-4C60-462E-A92C-CDAFD498799C}" type="datetimeFigureOut">
               <a:rPr lang="en-US" smtClean="0"/>
-              <a:t>3/7/2026</a:t>
+              <a:t>3/12/2026</a:t>
             </a:fld>
             <a:endParaRPr lang="en-US"/>
           </a:p>
@@ -5773,7 +5773,23 @@
           <a:p>
             <a:r>
               <a:rPr lang="en-US" dirty="0"/>
-              <a:t>The dataset contains two types of articles fake and real </a:t>
+              <a:t>The </a:t>
+            </a:r>
+            <a:r>
+              <a:rPr lang="en-US" dirty="0"/>
+              <a:t>ISOT Fake </a:t>
+            </a:r>
+            <a:r>
+              <a:rPr lang="en-US"/>
+              <a:t>News </a:t>
+            </a:r>
+            <a:r>
+              <a:rPr lang="en-US" smtClean="0"/>
+              <a:t>Dataset </a:t>
+            </a:r>
+            <a:r>
+              <a:rPr lang="en-US" dirty="0"/>
+              <a:t>contains two types of articles fake and real </a:t>
             </a:r>
             <a:r>
               <a:rPr lang="en-US" dirty="0" smtClean="0"/>
